--- a/assets/x/pptx/未投稿/vol32_00_intro.pptx
+++ b/assets/x/pptx/未投稿/vol32_00_intro.pptx
@@ -3411,7 +3411,7 @@
         <p:spPr>
           <a:xfrm>
             <a:off x="274320" y="1078992"/>
-            <a:ext cx="1434000" cy="1517904"/>
+            <a:ext cx="1436455" cy="1517904"/>
           </a:xfrm>
           <a:prstGeom prst="rect">
             <a:avLst/>
@@ -3597,7 +3597,7 @@
         <p:spPr>
           <a:xfrm>
             <a:off x="10378440" y="2761488"/>
-            <a:ext cx="981403" cy="1517904"/>
+            <a:ext cx="994929" cy="1517904"/>
           </a:xfrm>
           <a:prstGeom prst="rect">
             <a:avLst/>
@@ -3783,7 +3783,7 @@
         <p:spPr>
           <a:xfrm>
             <a:off x="274320" y="4443984"/>
-            <a:ext cx="1488519" cy="1481328"/>
+            <a:ext cx="1488315" cy="1481328"/>
           </a:xfrm>
           <a:prstGeom prst="rect">
             <a:avLst/>
